--- a/public/fun/pack/pptx/reviewpro/보장점검양식프리미엄_05_사업장점검_라일락실버.pptx
+++ b/public/fun/pack/pptx/reviewpro/보장점검양식프리미엄_05_사업장점검_라일락실버.pptx
@@ -112,12 +112,12 @@
   <p:extLst>
     <p:ext uri="{521415D9-36F7-43E2-AB2F-B90AF26B5E84}">
       <p14:sectionLst xmlns:p14="http://schemas.microsoft.com/office/powerpoint/2010/main">
-        <p14:section name="시작" id="{D9F33046-DB62-48BD-859B-5A1EBC3443AC}">
+        <p14:section name="시작" id="{8751BB74-9341-445C-8E8A-B0FD34DDEE2A}">
           <p14:sldIdLst>
             <p14:sldId id="256"/>
           </p14:sldIdLst>
         </p14:section>
-        <p14:section name="본문" id="{FF8FE9CB-4251-4A88-8C50-470C37E19DCA}">
+        <p14:section name="본문" id="{410A2D8E-EC64-436D-BC8F-2885E6D692A5}">
           <p14:sldIdLst>
             <p14:sldId id="257"/>
             <p14:sldId id="258"/>
@@ -1593,7 +1593,7 @@
             </a:lvl1pPr>
           </a:lstStyle>
           <a:p>
-            <a:fld id="{5D66D8EC-C218-4C8D-9ACD-955BB55F7A8C}" type="slidenum">
+            <a:fld id="{6A7280DE-D722-4F18-9F5A-E0DBE18FC72D}" type="slidenum">
               <a:rPr lang="en-US"/>
               <a:t>‹#›</a:t>
             </a:fld>
@@ -2248,7 +2248,7 @@
             </a:lvl1pPr>
           </a:lstStyle>
           <a:p>
-            <a:fld id="{02A7EB13-D2CF-4594-B01A-EB2B955AE124}" type="slidenum">
+            <a:fld id="{CD904556-11AB-4C75-8525-97EDD72D3298}" type="slidenum">
               <a:rPr lang="en-US"/>
               <a:t>‹#›</a:t>
             </a:fld>
@@ -2885,7 +2885,7 @@
             </a:lvl1pPr>
           </a:lstStyle>
           <a:p>
-            <a:fld id="{D91B4F5F-75BC-49E1-BDBF-1D684F00C79C}" type="slidenum">
+            <a:fld id="{CB83E2AA-2E9E-44D2-BE03-9CCE3DDFF944}" type="slidenum">
               <a:rPr lang="en-US"/>
               <a:t>‹#›</a:t>
             </a:fld>
@@ -3746,7 +3746,7 @@
           <a:p>
             <a:r>
               <a:rPr lang="ko-KR"/>
-              <a:t>사업장 점검 · 0000. 00. 00</a:t>
+              <a:t>사업장 점검 · 날짜 입력</a:t>
             </a:r>
           </a:p>
           <a:p>
@@ -3837,7 +3837,7 @@
           <a:bodyPr/>
           <a:lstStyle/>
           <a:p>
-            <a:fld id="{CB975E98-BEDF-4681-9122-95491B3CB4EB}" type="slidenum">
+            <a:fld id="{C7A3AA19-86BF-4316-A439-B0A54FA38E0D}" type="slidenum">
               <a:rPr lang="en-US"/>
               <a:t>‹#›</a:t>
             </a:fld>
@@ -4353,7 +4353,7 @@
           <a:bodyPr/>
           <a:lstStyle/>
           <a:p>
-            <a:fld id="{DF4DE847-BDD6-4777-9FD3-36ABD43245E1}" type="slidenum">
+            <a:fld id="{0D8C0FF0-E77C-42C5-BFAA-C13E4680645A}" type="slidenum">
               <a:rPr lang="en-US"/>
               <a:t>‹#›</a:t>
             </a:fld>
@@ -5859,7 +5859,7 @@
           <a:bodyPr/>
           <a:lstStyle/>
           <a:p>
-            <a:fld id="{E9189A42-1587-4D41-B800-DDD7ABBAC769}" type="slidenum">
+            <a:fld id="{AC2D6587-F580-45BA-914E-A17028D13F38}" type="slidenum">
               <a:rPr lang="en-US"/>
               <a:t>‹#›</a:t>
             </a:fld>
@@ -7409,7 +7409,7 @@
           <a:bodyPr/>
           <a:lstStyle/>
           <a:p>
-            <a:fld id="{9C8B73D4-0AD3-44BE-A77A-F5E6910C6C55}" type="slidenum">
+            <a:fld id="{D702EF2B-372D-4473-A171-3006F30C8005}" type="slidenum">
               <a:rPr lang="en-US"/>
               <a:t>‹#›</a:t>
             </a:fld>
@@ -8271,7 +8271,7 @@
           <a:bodyPr/>
           <a:lstStyle/>
           <a:p>
-            <a:fld id="{58DCCDFD-15CE-40D1-83B4-378C98E7B5A1}" type="slidenum">
+            <a:fld id="{2AE8C449-D652-4B38-BD8D-DBAF571318A6}" type="slidenum">
               <a:rPr lang="en-US"/>
               <a:t>‹#›</a:t>
             </a:fld>
